--- a/HashInsight_Product_Introduction_EN.pptx
+++ b/HashInsight_Product_Introduction_EN.pptx
@@ -3297,9 +3297,9 @@
           <a:p>
             <a:pPr>
               <a:spcBef>
-                <a:spcPts val="600"/>
-              </a:spcBef>
-              <a:defRPr sz="1600"/>
+                <a:spcPts val="400"/>
+              </a:spcBef>
+              <a:defRPr sz="1400"/>
             </a:pPr>
             <a:r>
               <a:t>Target Users</a:t>
@@ -3308,28 +3308,28 @@
           <a:p>
             <a:pPr>
               <a:spcBef>
-                <a:spcPts val="600"/>
-              </a:spcBef>
-              <a:defRPr sz="1600"/>
-            </a:pPr>
-            <a:r>
-              <a:t>  Mining farm operators, hosting providers, large-scale miners, institutional investors</a:t>
-            </a:r>
-          </a:p>
-          <a:p>
-            <a:pPr>
-              <a:spcBef>
-                <a:spcPts val="600"/>
-              </a:spcBef>
-              <a:defRPr sz="1600"/>
-            </a:pPr>
-          </a:p>
-          <a:p>
-            <a:pPr>
-              <a:spcBef>
-                <a:spcPts val="600"/>
-              </a:spcBef>
-              <a:defRPr sz="1600"/>
+                <a:spcPts val="400"/>
+              </a:spcBef>
+              <a:defRPr sz="1400"/>
+            </a:pPr>
+            <a:r>
+              <a:t>  Mining farms, hosting providers, large miners, institutional investors</a:t>
+            </a:r>
+          </a:p>
+          <a:p>
+            <a:pPr>
+              <a:spcBef>
+                <a:spcPts val="400"/>
+              </a:spcBef>
+              <a:defRPr sz="1400"/>
+            </a:pPr>
+          </a:p>
+          <a:p>
+            <a:pPr>
+              <a:spcBef>
+                <a:spcPts val="400"/>
+              </a:spcBef>
+              <a:defRPr sz="1400"/>
             </a:pPr>
             <a:r>
               <a:t>Core Value Proposition</a:t>
@@ -3338,31 +3338,20 @@
           <a:p>
             <a:pPr>
               <a:spcBef>
-                <a:spcPts val="600"/>
-              </a:spcBef>
-              <a:defRPr sz="1600"/>
-            </a:pPr>
-            <a:r>
-              <a:t>  Data-driven mining decisions</a:t>
-            </a:r>
-          </a:p>
-          <a:p>
-            <a:pPr>
-              <a:spcBef>
-                <a:spcPts val="600"/>
-              </a:spcBef>
-              <a:defRPr sz="1600"/>
-            </a:pPr>
-            <a:r>
-              <a:t>  Professional-grade financial management</a:t>
-            </a:r>
-          </a:p>
-          <a:p>
-            <a:pPr>
-              <a:spcBef>
-                <a:spcPts val="600"/>
-              </a:spcBef>
-              <a:defRPr sz="1600"/>
+                <a:spcPts val="400"/>
+              </a:spcBef>
+              <a:defRPr sz="1400"/>
+            </a:pPr>
+            <a:r>
+              <a:t>  Data-driven decisions, professional financial management</a:t>
+            </a:r>
+          </a:p>
+          <a:p>
+            <a:pPr>
+              <a:spcBef>
+                <a:spcPts val="400"/>
+              </a:spcBef>
+              <a:defRPr sz="1400"/>
             </a:pPr>
             <a:r>
               <a:t>  Transparent customer service</a:t>
@@ -3371,17 +3360,17 @@
           <a:p>
             <a:pPr>
               <a:spcBef>
-                <a:spcPts val="600"/>
-              </a:spcBef>
-              <a:defRPr sz="1600"/>
-            </a:pPr>
-          </a:p>
-          <a:p>
-            <a:pPr>
-              <a:spcBef>
-                <a:spcPts val="600"/>
-              </a:spcBef>
-              <a:defRPr sz="1600"/>
+                <a:spcPts val="400"/>
+              </a:spcBef>
+              <a:defRPr sz="1400"/>
+            </a:pPr>
+          </a:p>
+          <a:p>
+            <a:pPr>
+              <a:spcBef>
+                <a:spcPts val="400"/>
+              </a:spcBef>
+              <a:defRPr sz="1400"/>
             </a:pPr>
             <a:r>
               <a:t>Technical Guarantees</a:t>
@@ -3390,12 +3379,12 @@
           <a:p>
             <a:pPr>
               <a:spcBef>
-                <a:spcPts val="600"/>
-              </a:spcBef>
-              <a:defRPr sz="1600"/>
-            </a:pPr>
-            <a:r>
-              <a:t>  Enterprise-grade security, 99.95% SLA, 9.8x performance optimization</a:t>
+                <a:spcPts val="400"/>
+              </a:spcBef>
+              <a:defRPr sz="1400"/>
+            </a:pPr>
+            <a:r>
+              <a:t>  99.95% SLA, 9.8x performance, enterprise-grade security</a:t>
             </a:r>
           </a:p>
         </p:txBody>
@@ -3523,176 +3512,88 @@
           <a:p>
             <a:pPr>
               <a:spcBef>
-                <a:spcPts val="600"/>
-              </a:spcBef>
-              <a:defRPr sz="1600"/>
-            </a:pPr>
-            <a:r>
-              <a:t>1. Intelligent Mining Calculator</a:t>
-            </a:r>
-          </a:p>
-          <a:p>
-            <a:pPr>
-              <a:spcBef>
-                <a:spcPts val="600"/>
-              </a:spcBef>
-              <a:defRPr sz="1600"/>
-            </a:pPr>
-            <a:r>
-              <a:t>   • Supports 17+ miner models, dual-algorithm validation</a:t>
-            </a:r>
-          </a:p>
-          <a:p>
-            <a:pPr>
-              <a:spcBef>
-                <a:spcPts val="600"/>
-              </a:spcBef>
-              <a:defRPr sz="1600"/>
-            </a:pPr>
-            <a:r>
-              <a:t>   • Batch processing 5000+ miners, power curtailment analysis</a:t>
-            </a:r>
-          </a:p>
-          <a:p>
-            <a:pPr>
-              <a:spcBef>
-                <a:spcPts val="600"/>
-              </a:spcBef>
-              <a:defRPr sz="1600"/>
-            </a:pPr>
-          </a:p>
-          <a:p>
-            <a:pPr>
-              <a:spcBef>
-                <a:spcPts val="600"/>
-              </a:spcBef>
-              <a:defRPr sz="1600"/>
-            </a:pPr>
-            <a:r>
-              <a:t>2. Professional Technical Analysis Platform</a:t>
-            </a:r>
-          </a:p>
-          <a:p>
-            <a:pPr>
-              <a:spcBef>
-                <a:spcPts val="600"/>
-              </a:spcBef>
-              <a:defRPr sz="1600"/>
-            </a:pPr>
-            <a:r>
-              <a:t>   • 10 signal modules: RSI/MACD/Bollinger Bands</a:t>
-            </a:r>
-          </a:p>
-          <a:p>
-            <a:pPr>
-              <a:spcBef>
-                <a:spcPts val="600"/>
-              </a:spcBef>
-              <a:defRPr sz="1600"/>
-            </a:pPr>
-            <a:r>
-              <a:t>   • Intelligent market sentiment scoring</a:t>
-            </a:r>
-          </a:p>
-          <a:p>
-            <a:pPr>
-              <a:spcBef>
-                <a:spcPts val="600"/>
-              </a:spcBef>
-              <a:defRPr sz="1600"/>
-            </a:pPr>
-          </a:p>
-          <a:p>
-            <a:pPr>
-              <a:spcBef>
-                <a:spcPts val="600"/>
-              </a:spcBef>
-              <a:defRPr sz="1600"/>
-            </a:pPr>
-            <a:r>
-              <a:t>3. Treasury Management</a:t>
-            </a:r>
-          </a:p>
-          <a:p>
-            <a:pPr>
-              <a:spcBef>
-                <a:spcPts val="600"/>
-              </a:spcBef>
-              <a:defRPr sz="1600"/>
-            </a:pPr>
-            <a:r>
-              <a:t>   • BTC inventory tracking, selling strategy templates</a:t>
-            </a:r>
-          </a:p>
-          <a:p>
-            <a:pPr>
-              <a:spcBef>
-                <a:spcPts val="600"/>
-              </a:spcBef>
-              <a:defRPr sz="1600"/>
-            </a:pPr>
-            <a:r>
-              <a:t>   • Order execution optimization, backtesting engine</a:t>
-            </a:r>
-          </a:p>
-          <a:p>
-            <a:pPr>
-              <a:spcBef>
-                <a:spcPts val="600"/>
-              </a:spcBef>
-              <a:defRPr sz="1600"/>
-            </a:pPr>
-          </a:p>
-          <a:p>
-            <a:pPr>
-              <a:spcBef>
-                <a:spcPts val="600"/>
-              </a:spcBef>
-              <a:defRPr sz="1600"/>
-            </a:pPr>
-            <a:r>
-              <a:t>4. CRM Customer Management</a:t>
-            </a:r>
-          </a:p>
-          <a:p>
-            <a:pPr>
-              <a:spcBef>
-                <a:spcPts val="600"/>
-              </a:spcBef>
-              <a:defRPr sz="1600"/>
-            </a:pPr>
-            <a:r>
-              <a:t>   • Customer lifecycle management, automated commission calculation</a:t>
-            </a:r>
-          </a:p>
-          <a:p>
-            <a:pPr>
-              <a:spcBef>
-                <a:spcPts val="600"/>
-              </a:spcBef>
-              <a:defRPr sz="1600"/>
-            </a:pPr>
-          </a:p>
-          <a:p>
-            <a:pPr>
-              <a:spcBef>
-                <a:spcPts val="600"/>
-              </a:spcBef>
-              <a:defRPr sz="1600"/>
-            </a:pPr>
-            <a:r>
-              <a:t>5. Enterprise-Grade Security</a:t>
-            </a:r>
-          </a:p>
-          <a:p>
-            <a:pPr>
-              <a:spcBef>
-                <a:spcPts val="600"/>
-              </a:spcBef>
-              <a:defRPr sz="1600"/>
-            </a:pPr>
-            <a:r>
-              <a:t>   • KMS encryption, mTLS authentication, SOC 2 compliance</a:t>
+                <a:spcPts val="400"/>
+              </a:spcBef>
+              <a:defRPr sz="1400"/>
+            </a:pPr>
+            <a:r>
+              <a:t>1. Intelligent Mining Calculator - 17+ models, dual validation</a:t>
+            </a:r>
+          </a:p>
+          <a:p>
+            <a:pPr>
+              <a:spcBef>
+                <a:spcPts val="400"/>
+              </a:spcBef>
+              <a:defRPr sz="1400"/>
+            </a:pPr>
+          </a:p>
+          <a:p>
+            <a:pPr>
+              <a:spcBef>
+                <a:spcPts val="400"/>
+              </a:spcBef>
+              <a:defRPr sz="1400"/>
+            </a:pPr>
+            <a:r>
+              <a:t>2. Technical Analysis Platform - 10 signal modules</a:t>
+            </a:r>
+          </a:p>
+          <a:p>
+            <a:pPr>
+              <a:spcBef>
+                <a:spcPts val="400"/>
+              </a:spcBef>
+              <a:defRPr sz="1400"/>
+            </a:pPr>
+          </a:p>
+          <a:p>
+            <a:pPr>
+              <a:spcBef>
+                <a:spcPts val="400"/>
+              </a:spcBef>
+              <a:defRPr sz="1400"/>
+            </a:pPr>
+            <a:r>
+              <a:t>3. Treasury Management - BTC inventory, selling strategies</a:t>
+            </a:r>
+          </a:p>
+          <a:p>
+            <a:pPr>
+              <a:spcBef>
+                <a:spcPts val="400"/>
+              </a:spcBef>
+              <a:defRPr sz="1400"/>
+            </a:pPr>
+          </a:p>
+          <a:p>
+            <a:pPr>
+              <a:spcBef>
+                <a:spcPts val="400"/>
+              </a:spcBef>
+              <a:defRPr sz="1400"/>
+            </a:pPr>
+            <a:r>
+              <a:t>4. CRM Customer Management - Full lifecycle tracking</a:t>
+            </a:r>
+          </a:p>
+          <a:p>
+            <a:pPr>
+              <a:spcBef>
+                <a:spcPts val="400"/>
+              </a:spcBef>
+              <a:defRPr sz="1400"/>
+            </a:pPr>
+          </a:p>
+          <a:p>
+            <a:pPr>
+              <a:spcBef>
+                <a:spcPts val="400"/>
+              </a:spcBef>
+              <a:defRPr sz="1400"/>
+            </a:pPr>
+            <a:r>
+              <a:t>5. Enterprise Security - KMS, mTLS, WireGuard VPN, audit logging</a:t>
             </a:r>
           </a:p>
         </p:txBody>
@@ -3706,6 +3607,292 @@
 </file>
 
 <file path=ppt/slides/slide4.xml><?xml version="1.0" encoding="utf-8"?>
+<p:sld xmlns:a="http://schemas.openxmlformats.org/drawingml/2006/main" xmlns:p="http://schemas.openxmlformats.org/presentationml/2006/main" xmlns:r="http://schemas.openxmlformats.org/officeDocument/2006/relationships">
+  <p:cSld>
+    <p:spTree>
+      <p:nvGrpSpPr>
+        <p:cNvPr id="1" name=""/>
+        <p:cNvGrpSpPr/>
+        <p:nvPr/>
+      </p:nvGrpSpPr>
+      <p:grpSpPr/>
+      <p:sp>
+        <p:nvSpPr>
+          <p:cNvPr id="2" name="TextBox 1"/>
+          <p:cNvSpPr txBox="1"/>
+          <p:nvPr/>
+        </p:nvSpPr>
+        <p:spPr>
+          <a:xfrm>
+            <a:off x="457200" y="457200"/>
+            <a:ext cx="8229600" cy="731520"/>
+          </a:xfrm>
+          <a:prstGeom prst="rect">
+            <a:avLst/>
+          </a:prstGeom>
+          <a:noFill/>
+        </p:spPr>
+        <p:txBody>
+          <a:bodyPr wrap="none">
+            <a:spAutoFit/>
+          </a:bodyPr>
+          <a:lstStyle/>
+          <a:p>
+            <a:pPr>
+              <a:defRPr sz="3600" b="1">
+                <a:solidFill>
+                  <a:srgbClr val="2C3E50"/>
+                </a:solidFill>
+              </a:defRPr>
+            </a:pPr>
+            <a:r>
+              <a:t>Enterprise Security &amp; Compliance</a:t>
+            </a:r>
+          </a:p>
+        </p:txBody>
+      </p:sp>
+      <p:sp>
+        <p:nvSpPr>
+          <p:cNvPr id="3" name="Rectangle 2"/>
+          <p:cNvSpPr/>
+          <p:nvPr/>
+        </p:nvSpPr>
+        <p:spPr>
+          <a:xfrm>
+            <a:off x="457200" y="1143000"/>
+            <a:ext cx="8229600" cy="45720"/>
+          </a:xfrm>
+          <a:prstGeom prst="rect">
+            <a:avLst/>
+          </a:prstGeom>
+          <a:solidFill>
+            <a:srgbClr val="F39C12"/>
+          </a:solidFill>
+          <a:ln>
+            <a:solidFill>
+              <a:srgbClr val="F39C12"/>
+            </a:solidFill>
+          </a:ln>
+        </p:spPr>
+        <p:style>
+          <a:lnRef idx="1">
+            <a:schemeClr val="accent1"/>
+          </a:lnRef>
+          <a:fillRef idx="3">
+            <a:schemeClr val="accent1"/>
+          </a:fillRef>
+          <a:effectRef idx="2">
+            <a:schemeClr val="accent1"/>
+          </a:effectRef>
+          <a:fontRef idx="minor">
+            <a:schemeClr val="lt1"/>
+          </a:fontRef>
+        </p:style>
+        <p:txBody>
+          <a:bodyPr rtlCol="0" anchor="ctr"/>
+          <a:lstStyle/>
+          <a:p>
+            <a:pPr algn="ctr"/>
+          </a:p>
+        </p:txBody>
+      </p:sp>
+      <p:sp>
+        <p:nvSpPr>
+          <p:cNvPr id="4" name="TextBox 3"/>
+          <p:cNvSpPr txBox="1"/>
+          <p:nvPr/>
+        </p:nvSpPr>
+        <p:spPr>
+          <a:xfrm>
+            <a:off x="457200" y="1463040"/>
+            <a:ext cx="8229600" cy="4114800"/>
+          </a:xfrm>
+          <a:prstGeom prst="rect">
+            <a:avLst/>
+          </a:prstGeom>
+          <a:noFill/>
+        </p:spPr>
+        <p:txBody>
+          <a:bodyPr wrap="square">
+            <a:spAutoFit/>
+          </a:bodyPr>
+          <a:lstStyle/>
+          <a:p/>
+          <a:p>
+            <a:pPr>
+              <a:spcBef>
+                <a:spcPts val="400"/>
+              </a:spcBef>
+              <a:defRPr sz="1400"/>
+            </a:pPr>
+            <a:r>
+              <a:t>🔐 KMS Key Management</a:t>
+            </a:r>
+          </a:p>
+          <a:p>
+            <a:pPr>
+              <a:spcBef>
+                <a:spcPts val="400"/>
+              </a:spcBef>
+              <a:defRPr sz="1400"/>
+            </a:pPr>
+            <a:r>
+              <a:t>  • Multi-cloud: AWS KMS, GCP KMS, Azure Key Vault</a:t>
+            </a:r>
+          </a:p>
+          <a:p>
+            <a:pPr>
+              <a:spcBef>
+                <a:spcPts val="400"/>
+              </a:spcBef>
+              <a:defRPr sz="1400"/>
+            </a:pPr>
+            <a:r>
+              <a:t>  • AES-256 encryption, RSA-4096 keys, 90-day rotation</a:t>
+            </a:r>
+          </a:p>
+          <a:p>
+            <a:pPr>
+              <a:spcBef>
+                <a:spcPts val="400"/>
+              </a:spcBef>
+              <a:defRPr sz="1400"/>
+            </a:pPr>
+          </a:p>
+          <a:p>
+            <a:pPr>
+              <a:spcBef>
+                <a:spcPts val="400"/>
+              </a:spcBef>
+              <a:defRPr sz="1400"/>
+            </a:pPr>
+            <a:r>
+              <a:t>🔒 mTLS Mutual Authentication</a:t>
+            </a:r>
+          </a:p>
+          <a:p>
+            <a:pPr>
+              <a:spcBef>
+                <a:spcPts val="400"/>
+              </a:spcBef>
+              <a:defRPr sz="1400"/>
+            </a:pPr>
+            <a:r>
+              <a:t>  • X.509 certificates, CRL/OCSP checking, certificate pinning</a:t>
+            </a:r>
+          </a:p>
+          <a:p>
+            <a:pPr>
+              <a:spcBef>
+                <a:spcPts val="400"/>
+              </a:spcBef>
+              <a:defRPr sz="1400"/>
+            </a:pPr>
+          </a:p>
+          <a:p>
+            <a:pPr>
+              <a:spcBef>
+                <a:spcPts val="400"/>
+              </a:spcBef>
+              <a:defRPr sz="1400"/>
+            </a:pPr>
+            <a:r>
+              <a:t>🔑 Advanced API Key Management</a:t>
+            </a:r>
+          </a:p>
+          <a:p>
+            <a:pPr>
+              <a:spcBef>
+                <a:spcPts val="400"/>
+              </a:spcBef>
+              <a:defRPr sz="1400"/>
+            </a:pPr>
+            <a:r>
+              <a:t>  • Scoped permissions, rate limiting, automatic expiration</a:t>
+            </a:r>
+          </a:p>
+          <a:p>
+            <a:pPr>
+              <a:spcBef>
+                <a:spcPts val="400"/>
+              </a:spcBef>
+              <a:defRPr sz="1400"/>
+            </a:pPr>
+          </a:p>
+          <a:p>
+            <a:pPr>
+              <a:spcBef>
+                <a:spcPts val="400"/>
+              </a:spcBef>
+              <a:defRPr sz="1400"/>
+            </a:pPr>
+            <a:r>
+              <a:t>🛡️ WireGuard Enterprise VPN</a:t>
+            </a:r>
+          </a:p>
+          <a:p>
+            <a:pPr>
+              <a:spcBef>
+                <a:spcPts val="400"/>
+              </a:spcBef>
+              <a:defRPr sz="1400"/>
+            </a:pPr>
+            <a:r>
+              <a:t>  • Zero-trust architecture, ChaCha20-Poly1305 encryption</a:t>
+            </a:r>
+          </a:p>
+          <a:p>
+            <a:pPr>
+              <a:spcBef>
+                <a:spcPts val="400"/>
+              </a:spcBef>
+              <a:defRPr sz="1400"/>
+            </a:pPr>
+          </a:p>
+          <a:p>
+            <a:pPr>
+              <a:spcBef>
+                <a:spcPts val="400"/>
+              </a:spcBef>
+              <a:defRPr sz="1400"/>
+            </a:pPr>
+            <a:r>
+              <a:t>📝 Audit Logging &amp; Compliance</a:t>
+            </a:r>
+          </a:p>
+          <a:p>
+            <a:pPr>
+              <a:spcBef>
+                <a:spcPts val="400"/>
+              </a:spcBef>
+              <a:defRPr sz="1400"/>
+            </a:pPr>
+            <a:r>
+              <a:t>  • SOC 2 Type II ready, PCI DSS, GDPR compliant</a:t>
+            </a:r>
+          </a:p>
+          <a:p>
+            <a:pPr>
+              <a:spcBef>
+                <a:spcPts val="400"/>
+              </a:spcBef>
+              <a:defRPr sz="1400"/>
+            </a:pPr>
+            <a:r>
+              <a:t>  • 24/7 security operations, quarterly penetration testing</a:t>
+            </a:r>
+          </a:p>
+        </p:txBody>
+      </p:sp>
+    </p:spTree>
+  </p:cSld>
+  <p:clrMapOvr>
+    <a:masterClrMapping/>
+  </p:clrMapOvr>
+</p:sld>
+</file>
+
+<file path=ppt/slides/slide5.xml><?xml version="1.0" encoding="utf-8"?>
 <p:sld xmlns:a="http://schemas.openxmlformats.org/drawingml/2006/main" xmlns:p="http://schemas.openxmlformats.org/presentationml/2006/main" xmlns:r="http://schemas.openxmlformats.org/officeDocument/2006/relationships">
   <p:cSld>
     <p:spTree>
@@ -3979,7 +4166,7 @@
                         <a:defRPr sz="1100"/>
                       </a:pPr>
                       <a:r>
-                        <a:t>Fast response guarantee</a:t>
+                        <a:t>Fast response</a:t>
                       </a:r>
                     </a:p>
                   </a:txBody>
@@ -4047,7 +4234,7 @@
                         <a:defRPr sz="1100"/>
                       </a:pPr>
                       <a:r>
-                        <a:t>Performance Boost</a:t>
+                        <a:t>Performance</a:t>
                       </a:r>
                     </a:p>
                   </a:txBody>
@@ -4085,7 +4272,7 @@
                         <a:defRPr sz="1100"/>
                       </a:pPr>
                       <a:r>
-                        <a:t>Request Coalescing optimization</a:t>
+                        <a:t>Request Coalescing</a:t>
                       </a:r>
                     </a:p>
                   </a:txBody>
@@ -4106,7 +4293,7 @@
                         <a:defRPr sz="1100"/>
                       </a:pPr>
                       <a:r>
-                        <a:t>Batch Processing</a:t>
+                        <a:t>Batch Process</a:t>
                       </a:r>
                     </a:p>
                   </a:txBody>
@@ -4136,7 +4323,7 @@
                         <a:defRPr sz="1100"/>
                       </a:pPr>
                       <a:r>
-                        <a:t>Concurrent computation</a:t>
+                        <a:t>Concurrent calculation</a:t>
                       </a:r>
                     </a:p>
                   </a:txBody>
@@ -4155,7 +4342,7 @@
 </p:sld>
 </file>
 
-<file path=ppt/slides/slide5.xml><?xml version="1.0" encoding="utf-8"?>
+<file path=ppt/slides/slide6.xml><?xml version="1.0" encoding="utf-8"?>
 <p:sld xmlns:a="http://schemas.openxmlformats.org/drawingml/2006/main" xmlns:p="http://schemas.openxmlformats.org/presentationml/2006/main" xmlns:r="http://schemas.openxmlformats.org/officeDocument/2006/relationships">
   <p:cSld>
     <p:spTree>
@@ -4270,9 +4457,9 @@
           <a:p>
             <a:pPr>
               <a:spcBef>
-                <a:spcPts val="600"/>
-              </a:spcBef>
-              <a:defRPr sz="1600"/>
+                <a:spcPts val="400"/>
+              </a:spcBef>
+              <a:defRPr sz="1400"/>
             </a:pPr>
             <a:r>
               <a:t>1. Industry's Only Dual-Algorithm Validation System</a:t>
@@ -4281,58 +4468,36 @@
           <a:p>
             <a:pPr>
               <a:spcBef>
-                <a:spcPts val="600"/>
-              </a:spcBef>
-              <a:defRPr sz="1600"/>
-            </a:pPr>
-            <a:r>
-              <a:t>   Ensures calculation accuracy, avoids investment errors</a:t>
-            </a:r>
-          </a:p>
-          <a:p>
-            <a:pPr>
-              <a:spcBef>
-                <a:spcPts val="600"/>
-              </a:spcBef>
-              <a:defRPr sz="1600"/>
-            </a:pPr>
-          </a:p>
-          <a:p>
-            <a:pPr>
-              <a:spcBef>
-                <a:spcPts val="600"/>
-              </a:spcBef>
-              <a:defRPr sz="1600"/>
-            </a:pPr>
-            <a:r>
-              <a:t>2. 9.8x Performance Boost with Request Coalescing</a:t>
-            </a:r>
-          </a:p>
-          <a:p>
-            <a:pPr>
-              <a:spcBef>
-                <a:spcPts val="600"/>
-              </a:spcBef>
-              <a:defRPr sz="1600"/>
-            </a:pPr>
-            <a:r>
-              <a:t>   Industry-leading concurrent request merging technology</a:t>
-            </a:r>
-          </a:p>
-          <a:p>
-            <a:pPr>
-              <a:spcBef>
-                <a:spcPts val="600"/>
-              </a:spcBef>
-              <a:defRPr sz="1600"/>
-            </a:pPr>
-          </a:p>
-          <a:p>
-            <a:pPr>
-              <a:spcBef>
-                <a:spcPts val="600"/>
-              </a:spcBef>
-              <a:defRPr sz="1600"/>
+                <a:spcPts val="400"/>
+              </a:spcBef>
+              <a:defRPr sz="1400"/>
+            </a:pPr>
+          </a:p>
+          <a:p>
+            <a:pPr>
+              <a:spcBef>
+                <a:spcPts val="400"/>
+              </a:spcBef>
+              <a:defRPr sz="1400"/>
+            </a:pPr>
+            <a:r>
+              <a:t>2. 9.8x Performance via Request Coalescing</a:t>
+            </a:r>
+          </a:p>
+          <a:p>
+            <a:pPr>
+              <a:spcBef>
+                <a:spcPts val="400"/>
+              </a:spcBef>
+              <a:defRPr sz="1400"/>
+            </a:pPr>
+          </a:p>
+          <a:p>
+            <a:pPr>
+              <a:spcBef>
+                <a:spcPts val="400"/>
+              </a:spcBef>
+              <a:defRPr sz="1400"/>
             </a:pPr>
             <a:r>
               <a:t>3. Professional-Grade Treasury Management</a:t>
@@ -4341,28 +4506,17 @@
           <a:p>
             <a:pPr>
               <a:spcBef>
-                <a:spcPts val="600"/>
-              </a:spcBef>
-              <a:defRPr sz="1600"/>
-            </a:pPr>
-            <a:r>
-              <a:t>   Institutional investor-level BTC inventory management</a:t>
-            </a:r>
-          </a:p>
-          <a:p>
-            <a:pPr>
-              <a:spcBef>
-                <a:spcPts val="600"/>
-              </a:spcBef>
-              <a:defRPr sz="1600"/>
-            </a:pPr>
-          </a:p>
-          <a:p>
-            <a:pPr>
-              <a:spcBef>
-                <a:spcPts val="600"/>
-              </a:spcBef>
-              <a:defRPr sz="1600"/>
+                <a:spcPts val="400"/>
+              </a:spcBef>
+              <a:defRPr sz="1400"/>
+            </a:pPr>
+          </a:p>
+          <a:p>
+            <a:pPr>
+              <a:spcBef>
+                <a:spcPts val="400"/>
+              </a:spcBef>
+              <a:defRPr sz="1400"/>
             </a:pPr>
             <a:r>
               <a:t>4. 10 Intelligent Signal Aggregation Modules</a:t>
@@ -4371,28 +4525,17 @@
           <a:p>
             <a:pPr>
               <a:spcBef>
-                <a:spcPts val="600"/>
-              </a:spcBef>
-              <a:defRPr sz="1600"/>
-            </a:pPr>
-            <a:r>
-              <a:t>   Integrates technical analysis, on-chain data, derivatives markets</a:t>
-            </a:r>
-          </a:p>
-          <a:p>
-            <a:pPr>
-              <a:spcBef>
-                <a:spcPts val="600"/>
-              </a:spcBef>
-              <a:defRPr sz="1600"/>
-            </a:pPr>
-          </a:p>
-          <a:p>
-            <a:pPr>
-              <a:spcBef>
-                <a:spcPts val="600"/>
-              </a:spcBef>
-              <a:defRPr sz="1600"/>
+                <a:spcPts val="400"/>
+              </a:spcBef>
+              <a:defRPr sz="1400"/>
+            </a:pPr>
+          </a:p>
+          <a:p>
+            <a:pPr>
+              <a:spcBef>
+                <a:spcPts val="400"/>
+              </a:spcBef>
+              <a:defRPr sz="1400"/>
             </a:pPr>
             <a:r>
               <a:t>5. Enterprise-Grade Security &amp; Compliance</a:t>
@@ -4401,42 +4544,31 @@
           <a:p>
             <a:pPr>
               <a:spcBef>
-                <a:spcPts val="600"/>
-              </a:spcBef>
-              <a:defRPr sz="1600"/>
-            </a:pPr>
-            <a:r>
-              <a:t>   KMS encryption, mTLS authentication, SOC 2 ready</a:t>
-            </a:r>
-          </a:p>
-          <a:p>
-            <a:pPr>
-              <a:spcBef>
-                <a:spcPts val="600"/>
-              </a:spcBef>
-              <a:defRPr sz="1600"/>
-            </a:pPr>
-          </a:p>
-          <a:p>
-            <a:pPr>
-              <a:spcBef>
-                <a:spcPts val="600"/>
-              </a:spcBef>
-              <a:defRPr sz="1600"/>
-            </a:pPr>
-            <a:r>
-              <a:t>6. Complete Page Isolation Architecture</a:t>
-            </a:r>
-          </a:p>
-          <a:p>
-            <a:pPr>
-              <a:spcBef>
-                <a:spcPts val="600"/>
-              </a:spcBef>
-              <a:defRPr sz="1600"/>
-            </a:pPr>
-            <a:r>
-              <a:t>   Modular design, flexible scaling</a:t>
+                <a:spcPts val="400"/>
+              </a:spcBef>
+              <a:defRPr sz="1400"/>
+            </a:pPr>
+            <a:r>
+              <a:t>   KMS encryption, mTLS auth, SOC 2 ready</a:t>
+            </a:r>
+          </a:p>
+          <a:p>
+            <a:pPr>
+              <a:spcBef>
+                <a:spcPts val="400"/>
+              </a:spcBef>
+              <a:defRPr sz="1400"/>
+            </a:pPr>
+          </a:p>
+          <a:p>
+            <a:pPr>
+              <a:spcBef>
+                <a:spcPts val="400"/>
+              </a:spcBef>
+              <a:defRPr sz="1400"/>
+            </a:pPr>
+            <a:r>
+              <a:t>6. Fully Page-Isolated Architecture</a:t>
             </a:r>
           </a:p>
         </p:txBody>
@@ -4449,7 +4581,7 @@
 </p:sld>
 </file>
 
-<file path=ppt/slides/slide6.xml><?xml version="1.0" encoding="utf-8"?>
+<file path=ppt/slides/slide7.xml><?xml version="1.0" encoding="utf-8"?>
 <p:sld xmlns:a="http://schemas.openxmlformats.org/drawingml/2006/main" xmlns:p="http://schemas.openxmlformats.org/presentationml/2006/main" xmlns:r="http://schemas.openxmlformats.org/officeDocument/2006/relationships">
   <p:cSld>
     <p:spTree>
@@ -4564,9 +4696,9 @@
           <a:p>
             <a:pPr>
               <a:spcBef>
-                <a:spcPts val="600"/>
-              </a:spcBef>
-              <a:defRPr sz="1600"/>
+                <a:spcPts val="400"/>
+              </a:spcBef>
+              <a:defRPr sz="1400"/>
             </a:pPr>
             <a:r>
               <a:t>Large Mining Farms</a:t>
@@ -4575,39 +4707,28 @@
           <a:p>
             <a:pPr>
               <a:spcBef>
-                <a:spcPts val="600"/>
-              </a:spcBef>
-              <a:defRPr sz="1600"/>
-            </a:pPr>
-            <a:r>
-              <a:t>   • Managing thousands of miners, real-time revenue monitoring</a:t>
-            </a:r>
-          </a:p>
-          <a:p>
-            <a:pPr>
-              <a:spcBef>
-                <a:spcPts val="600"/>
-              </a:spcBef>
-              <a:defRPr sz="1600"/>
-            </a:pPr>
-            <a:r>
-              <a:t>   • Value: 10x calculation efficiency, 15-20% power cost savings</a:t>
-            </a:r>
-          </a:p>
-          <a:p>
-            <a:pPr>
-              <a:spcBef>
-                <a:spcPts val="600"/>
-              </a:spcBef>
-              <a:defRPr sz="1600"/>
-            </a:pPr>
-          </a:p>
-          <a:p>
-            <a:pPr>
-              <a:spcBef>
-                <a:spcPts val="600"/>
-              </a:spcBef>
-              <a:defRPr sz="1600"/>
+                <a:spcPts val="400"/>
+              </a:spcBef>
+              <a:defRPr sz="1400"/>
+            </a:pPr>
+            <a:r>
+              <a:t>  • 15,000+ miners, 10x efficiency, 15-20% cost savings</a:t>
+            </a:r>
+          </a:p>
+          <a:p>
+            <a:pPr>
+              <a:spcBef>
+                <a:spcPts val="400"/>
+              </a:spcBef>
+              <a:defRPr sz="1400"/>
+            </a:pPr>
+          </a:p>
+          <a:p>
+            <a:pPr>
+              <a:spcBef>
+                <a:spcPts val="400"/>
+              </a:spcBef>
+              <a:defRPr sz="1400"/>
             </a:pPr>
             <a:r>
               <a:t>Hosting Providers</a:t>
@@ -4616,39 +4737,28 @@
           <a:p>
             <a:pPr>
               <a:spcBef>
-                <a:spcPts val="600"/>
-              </a:spcBef>
-              <a:defRPr sz="1600"/>
-            </a:pPr>
-            <a:r>
-              <a:t>   • Transparent pricing, real-time revenue tracking, professional reports</a:t>
-            </a:r>
-          </a:p>
-          <a:p>
-            <a:pPr>
-              <a:spcBef>
-                <a:spcPts val="600"/>
-              </a:spcBef>
-              <a:defRPr sz="1600"/>
-            </a:pPr>
-            <a:r>
-              <a:t>   • Value: 40% increase in customer trust, standardized services</a:t>
-            </a:r>
-          </a:p>
-          <a:p>
-            <a:pPr>
-              <a:spcBef>
-                <a:spcPts val="600"/>
-              </a:spcBef>
-              <a:defRPr sz="1600"/>
-            </a:pPr>
-          </a:p>
-          <a:p>
-            <a:pPr>
-              <a:spcBef>
-                <a:spcPts val="600"/>
-              </a:spcBef>
-              <a:defRPr sz="1600"/>
+                <a:spcPts val="400"/>
+              </a:spcBef>
+              <a:defRPr sz="1400"/>
+            </a:pPr>
+            <a:r>
+              <a:t>  • 300+ clients, 40% trust increase, standardized service</a:t>
+            </a:r>
+          </a:p>
+          <a:p>
+            <a:pPr>
+              <a:spcBef>
+                <a:spcPts val="400"/>
+              </a:spcBef>
+              <a:defRPr sz="1400"/>
+            </a:pPr>
+          </a:p>
+          <a:p>
+            <a:pPr>
+              <a:spcBef>
+                <a:spcPts val="400"/>
+              </a:spcBef>
+              <a:defRPr sz="1400"/>
             </a:pPr>
             <a:r>
               <a:t>Institutional Investors</a:t>
@@ -4657,263 +4767,12 @@
           <a:p>
             <a:pPr>
               <a:spcBef>
-                <a:spcPts val="600"/>
-              </a:spcBef>
-              <a:defRPr sz="1600"/>
-            </a:pPr>
-            <a:r>
-              <a:t>   • ROI evaluation, BTC inventory management, optimized selling strategies</a:t>
-            </a:r>
-          </a:p>
-          <a:p>
-            <a:pPr>
-              <a:spcBef>
-                <a:spcPts val="600"/>
-              </a:spcBef>
-              <a:defRPr sz="1600"/>
-            </a:pPr>
-            <a:r>
-              <a:t>   • Value: Data-driven decisions, 10-15% improved selling timing</a:t>
-            </a:r>
-          </a:p>
-        </p:txBody>
-      </p:sp>
-    </p:spTree>
-  </p:cSld>
-  <p:clrMapOvr>
-    <a:masterClrMapping/>
-  </p:clrMapOvr>
-</p:sld>
-</file>
-
-<file path=ppt/slides/slide7.xml><?xml version="1.0" encoding="utf-8"?>
-<p:sld xmlns:a="http://schemas.openxmlformats.org/drawingml/2006/main" xmlns:p="http://schemas.openxmlformats.org/presentationml/2006/main" xmlns:r="http://schemas.openxmlformats.org/officeDocument/2006/relationships">
-  <p:cSld>
-    <p:spTree>
-      <p:nvGrpSpPr>
-        <p:cNvPr id="1" name=""/>
-        <p:cNvGrpSpPr/>
-        <p:nvPr/>
-      </p:nvGrpSpPr>
-      <p:grpSpPr/>
-      <p:sp>
-        <p:nvSpPr>
-          <p:cNvPr id="2" name="TextBox 1"/>
-          <p:cNvSpPr txBox="1"/>
-          <p:nvPr/>
-        </p:nvSpPr>
-        <p:spPr>
-          <a:xfrm>
-            <a:off x="457200" y="457200"/>
-            <a:ext cx="8229600" cy="731520"/>
-          </a:xfrm>
-          <a:prstGeom prst="rect">
-            <a:avLst/>
-          </a:prstGeom>
-          <a:noFill/>
-        </p:spPr>
-        <p:txBody>
-          <a:bodyPr wrap="none">
-            <a:spAutoFit/>
-          </a:bodyPr>
-          <a:lstStyle/>
-          <a:p>
-            <a:pPr>
-              <a:defRPr sz="3600" b="1">
-                <a:solidFill>
-                  <a:srgbClr val="2C3E50"/>
-                </a:solidFill>
-              </a:defRPr>
-            </a:pPr>
-            <a:r>
-              <a:t>Customer Success Stories</a:t>
-            </a:r>
-          </a:p>
-        </p:txBody>
-      </p:sp>
-      <p:sp>
-        <p:nvSpPr>
-          <p:cNvPr id="3" name="Rectangle 2"/>
-          <p:cNvSpPr/>
-          <p:nvPr/>
-        </p:nvSpPr>
-        <p:spPr>
-          <a:xfrm>
-            <a:off x="457200" y="1143000"/>
-            <a:ext cx="8229600" cy="45720"/>
-          </a:xfrm>
-          <a:prstGeom prst="rect">
-            <a:avLst/>
-          </a:prstGeom>
-          <a:solidFill>
-            <a:srgbClr val="F39C12"/>
-          </a:solidFill>
-          <a:ln>
-            <a:solidFill>
-              <a:srgbClr val="F39C12"/>
-            </a:solidFill>
-          </a:ln>
-        </p:spPr>
-        <p:style>
-          <a:lnRef idx="1">
-            <a:schemeClr val="accent1"/>
-          </a:lnRef>
-          <a:fillRef idx="3">
-            <a:schemeClr val="accent1"/>
-          </a:fillRef>
-          <a:effectRef idx="2">
-            <a:schemeClr val="accent1"/>
-          </a:effectRef>
-          <a:fontRef idx="minor">
-            <a:schemeClr val="lt1"/>
-          </a:fontRef>
-        </p:style>
-        <p:txBody>
-          <a:bodyPr rtlCol="0" anchor="ctr"/>
-          <a:lstStyle/>
-          <a:p>
-            <a:pPr algn="ctr"/>
-          </a:p>
-        </p:txBody>
-      </p:sp>
-      <p:sp>
-        <p:nvSpPr>
-          <p:cNvPr id="4" name="TextBox 3"/>
-          <p:cNvSpPr txBox="1"/>
-          <p:nvPr/>
-        </p:nvSpPr>
-        <p:spPr>
-          <a:xfrm>
-            <a:off x="457200" y="1463040"/>
-            <a:ext cx="8229600" cy="4114800"/>
-          </a:xfrm>
-          <a:prstGeom prst="rect">
-            <a:avLst/>
-          </a:prstGeom>
-          <a:noFill/>
-        </p:spPr>
-        <p:txBody>
-          <a:bodyPr wrap="square">
-            <a:spAutoFit/>
-          </a:bodyPr>
-          <a:lstStyle/>
-          <a:p/>
-          <a:p>
-            <a:pPr>
-              <a:spcBef>
-                <a:spcPts val="600"/>
-              </a:spcBef>
-              <a:defRPr sz="1600"/>
-            </a:pPr>
-            <a:r>
-              <a:t>Case 1: 100MW Mining Farm</a:t>
-            </a:r>
-          </a:p>
-          <a:p>
-            <a:pPr>
-              <a:spcBef>
-                <a:spcPts val="600"/>
-              </a:spcBef>
-              <a:defRPr sz="1600"/>
-            </a:pPr>
-            <a:r>
-              <a:t>   • Managing 15,000+ miners</a:t>
-            </a:r>
-          </a:p>
-          <a:p>
-            <a:pPr>
-              <a:spcBef>
-                <a:spcPts val="600"/>
-              </a:spcBef>
-              <a:defRPr sz="1600"/>
-            </a:pPr>
-            <a:r>
-              <a:t>   • Results: Revenue calculation from 2 hours to 5 minutes</a:t>
-            </a:r>
-          </a:p>
-          <a:p>
-            <a:pPr>
-              <a:spcBef>
-                <a:spcPts val="600"/>
-              </a:spcBef>
-              <a:defRPr sz="1600"/>
-            </a:pPr>
-            <a:r>
-              <a:t>             Annual power cost savings of $1.8M</a:t>
-            </a:r>
-          </a:p>
-          <a:p>
-            <a:pPr>
-              <a:spcBef>
-                <a:spcPts val="600"/>
-              </a:spcBef>
-              <a:defRPr sz="1600"/>
-            </a:pPr>
-            <a:r>
-              <a:t>             70% reduction in customer complaints</a:t>
-            </a:r>
-          </a:p>
-          <a:p>
-            <a:pPr>
-              <a:spcBef>
-                <a:spcPts val="600"/>
-              </a:spcBef>
-              <a:defRPr sz="1600"/>
-            </a:pPr>
-          </a:p>
-          <a:p>
-            <a:pPr>
-              <a:spcBef>
-                <a:spcPts val="600"/>
-              </a:spcBef>
-              <a:defRPr sz="1600"/>
-            </a:pPr>
-            <a:r>
-              <a:t>Case 2: Hosting Service Provider</a:t>
-            </a:r>
-          </a:p>
-          <a:p>
-            <a:pPr>
-              <a:spcBef>
-                <a:spcPts val="600"/>
-              </a:spcBef>
-              <a:defRPr sz="1600"/>
-            </a:pPr>
-            <a:r>
-              <a:t>   • Providing hosting for 300+ clients</a:t>
-            </a:r>
-          </a:p>
-          <a:p>
-            <a:pPr>
-              <a:spcBef>
-                <a:spcPts val="600"/>
-              </a:spcBef>
-              <a:defRPr sz="1600"/>
-            </a:pPr>
-            <a:r>
-              <a:t>   • Results: 60% reduction in customer management costs</a:t>
-            </a:r>
-          </a:p>
-          <a:p>
-            <a:pPr>
-              <a:spcBef>
-                <a:spcPts val="600"/>
-              </a:spcBef>
-              <a:defRPr sz="1600"/>
-            </a:pPr>
-            <a:r>
-              <a:t>             35% increase in new customer conversion</a:t>
-            </a:r>
-          </a:p>
-          <a:p>
-            <a:pPr>
-              <a:spcBef>
-                <a:spcPts val="600"/>
-              </a:spcBef>
-              <a:defRPr sz="1600"/>
-            </a:pPr>
-            <a:r>
-              <a:t>             $500K/year additional service revenue</a:t>
+                <a:spcPts val="400"/>
+              </a:spcBef>
+              <a:defRPr sz="1400"/>
+            </a:pPr>
+            <a:r>
+              <a:t>  • ROI evaluation, BTC inventory, 10-15% better timing</a:t>
             </a:r>
           </a:p>
         </p:txBody>
@@ -5169,7 +5028,7 @@
                         <a:defRPr sz="1100"/>
                       </a:pPr>
                       <a:r>
-                        <a:t>Individual miners</a:t>
+                        <a:t>Individual</a:t>
                       </a:r>
                     </a:p>
                   </a:txBody>
@@ -5239,7 +5098,7 @@
                         <a:defRPr sz="1100"/>
                       </a:pPr>
                       <a:r>
-                        <a:t>Small-medium farms</a:t>
+                        <a:t>Small-medium</a:t>
                       </a:r>
                     </a:p>
                   </a:txBody>
@@ -5258,7 +5117,7 @@
                         <a:defRPr sz="1100"/>
                       </a:pPr>
                       <a:r>
-                        <a:t>Batch calc, analytics, CRM</a:t>
+                        <a:t>Batch, analytics, CRM</a:t>
                       </a:r>
                     </a:p>
                   </a:txBody>
@@ -5324,7 +5183,7 @@
                         <a:defRPr sz="1100"/>
                       </a:pPr>
                       <a:r>
-                        <a:t>Full features, Treasury, priority support</a:t>
+                        <a:t>Full features, Treasury</a:t>
                       </a:r>
                     </a:p>
                   </a:txBody>
@@ -5360,7 +5219,7 @@
                         <a:defRPr sz="1100"/>
                       </a:pPr>
                       <a:r>
-                        <a:t>Custom quote</a:t>
+                        <a:t>Custom</a:t>
                       </a:r>
                     </a:p>
                   </a:txBody>
@@ -5379,7 +5238,7 @@
                         <a:defRPr sz="1100"/>
                       </a:pPr>
                       <a:r>
-                        <a:t>Ultra-large scale</a:t>
+                        <a:t>Ultra-large</a:t>
                       </a:r>
                     </a:p>
                   </a:txBody>
@@ -5398,7 +5257,7 @@
                         <a:defRPr sz="1100"/>
                       </a:pPr>
                       <a:r>
-                        <a:t>Private deployment, dedicated servers</a:t>
+                        <a:t>Private deployment</a:t>
                       </a:r>
                     </a:p>
                   </a:txBody>
@@ -5536,9 +5395,9 @@
           <a:p>
             <a:pPr>
               <a:spcBef>
-                <a:spcPts val="600"/>
-              </a:spcBef>
-              <a:defRPr sz="1600"/>
+                <a:spcPts val="400"/>
+              </a:spcBef>
+              <a:defRPr sz="1400"/>
             </a:pPr>
             <a:r>
               <a:t>Business Inquiries</a:t>
@@ -5547,28 +5406,28 @@
           <a:p>
             <a:pPr>
               <a:spcBef>
-                <a:spcPts val="600"/>
-              </a:spcBef>
-              <a:defRPr sz="1600"/>
-            </a:pPr>
-            <a:r>
-              <a:t>   sales@hashinsight.io</a:t>
-            </a:r>
-          </a:p>
-          <a:p>
-            <a:pPr>
-              <a:spcBef>
-                <a:spcPts val="600"/>
-              </a:spcBef>
-              <a:defRPr sz="1600"/>
-            </a:pPr>
-          </a:p>
-          <a:p>
-            <a:pPr>
-              <a:spcBef>
-                <a:spcPts val="600"/>
-              </a:spcBef>
-              <a:defRPr sz="1600"/>
+                <a:spcPts val="400"/>
+              </a:spcBef>
+              <a:defRPr sz="1400"/>
+            </a:pPr>
+            <a:r>
+              <a:t>  sales@hashinsight.io</a:t>
+            </a:r>
+          </a:p>
+          <a:p>
+            <a:pPr>
+              <a:spcBef>
+                <a:spcPts val="400"/>
+              </a:spcBef>
+              <a:defRPr sz="1400"/>
+            </a:pPr>
+          </a:p>
+          <a:p>
+            <a:pPr>
+              <a:spcBef>
+                <a:spcPts val="400"/>
+              </a:spcBef>
+              <a:defRPr sz="1400"/>
             </a:pPr>
             <a:r>
               <a:t>Technical Support</a:t>
@@ -5577,28 +5436,28 @@
           <a:p>
             <a:pPr>
               <a:spcBef>
-                <a:spcPts val="600"/>
-              </a:spcBef>
-              <a:defRPr sz="1600"/>
-            </a:pPr>
-            <a:r>
-              <a:t>   support@hashinsight.io</a:t>
-            </a:r>
-          </a:p>
-          <a:p>
-            <a:pPr>
-              <a:spcBef>
-                <a:spcPts val="600"/>
-              </a:spcBef>
-              <a:defRPr sz="1600"/>
-            </a:pPr>
-          </a:p>
-          <a:p>
-            <a:pPr>
-              <a:spcBef>
-                <a:spcPts val="600"/>
-              </a:spcBef>
-              <a:defRPr sz="1600"/>
+                <a:spcPts val="400"/>
+              </a:spcBef>
+              <a:defRPr sz="1400"/>
+            </a:pPr>
+            <a:r>
+              <a:t>  support@hashinsight.io</a:t>
+            </a:r>
+          </a:p>
+          <a:p>
+            <a:pPr>
+              <a:spcBef>
+                <a:spcPts val="400"/>
+              </a:spcBef>
+              <a:defRPr sz="1400"/>
+            </a:pPr>
+          </a:p>
+          <a:p>
+            <a:pPr>
+              <a:spcBef>
+                <a:spcPts val="400"/>
+              </a:spcBef>
+              <a:defRPr sz="1400"/>
             </a:pPr>
             <a:r>
               <a:t>Official Website</a:t>
@@ -5607,28 +5466,28 @@
           <a:p>
             <a:pPr>
               <a:spcBef>
-                <a:spcPts val="600"/>
-              </a:spcBef>
-              <a:defRPr sz="1600"/>
-            </a:pPr>
-            <a:r>
-              <a:t>   https://hashinsight.io</a:t>
-            </a:r>
-          </a:p>
-          <a:p>
-            <a:pPr>
-              <a:spcBef>
-                <a:spcPts val="600"/>
-              </a:spcBef>
-              <a:defRPr sz="1600"/>
-            </a:pPr>
-          </a:p>
-          <a:p>
-            <a:pPr>
-              <a:spcBef>
-                <a:spcPts val="600"/>
-              </a:spcBef>
-              <a:defRPr sz="1600"/>
+                <a:spcPts val="400"/>
+              </a:spcBef>
+              <a:defRPr sz="1400"/>
+            </a:pPr>
+            <a:r>
+              <a:t>  https://hashinsight.io</a:t>
+            </a:r>
+          </a:p>
+          <a:p>
+            <a:pPr>
+              <a:spcBef>
+                <a:spcPts val="400"/>
+              </a:spcBef>
+              <a:defRPr sz="1400"/>
+            </a:pPr>
+          </a:p>
+          <a:p>
+            <a:pPr>
+              <a:spcBef>
+                <a:spcPts val="400"/>
+              </a:spcBef>
+              <a:defRPr sz="1400"/>
             </a:pPr>
             <a:r>
               <a:t>Enterprise Support</a:t>
@@ -5637,34 +5496,12 @@
           <a:p>
             <a:pPr>
               <a:spcBef>
-                <a:spcPts val="600"/>
-              </a:spcBef>
-              <a:defRPr sz="1600"/>
-            </a:pPr>
-            <a:r>
-              <a:t>   • 24/7 technical support hotline</a:t>
-            </a:r>
-          </a:p>
-          <a:p>
-            <a:pPr>
-              <a:spcBef>
-                <a:spcPts val="600"/>
-              </a:spcBef>
-              <a:defRPr sz="1600"/>
-            </a:pPr>
-            <a:r>
-              <a:t>   • 1-hour response SLA</a:t>
-            </a:r>
-          </a:p>
-          <a:p>
-            <a:pPr>
-              <a:spcBef>
-                <a:spcPts val="600"/>
-              </a:spcBef>
-              <a:defRPr sz="1600"/>
-            </a:pPr>
-            <a:r>
-              <a:t>   • Dedicated customer success manager</a:t>
+                <a:spcPts val="400"/>
+              </a:spcBef>
+              <a:defRPr sz="1400"/>
+            </a:pPr>
+            <a:r>
+              <a:t>  • 24/7 technical hotline, 1-hour response SLA</a:t>
             </a:r>
           </a:p>
         </p:txBody>

--- a/HashInsight_Product_Introduction_EN.pptx
+++ b/HashInsight_Product_Introduction_EN.pptx
@@ -3313,7 +3313,7 @@
               <a:defRPr sz="1400"/>
             </a:pPr>
             <a:r>
-              <a:t>  Mining farms, hosting providers, large miners, institutional investors</a:t>
+              <a:t>  Mining farms, hosting providers, institutional investors</a:t>
             </a:r>
           </a:p>
           <a:p>
@@ -3332,7 +3332,7 @@
               <a:defRPr sz="1400"/>
             </a:pPr>
             <a:r>
-              <a:t>Core Value Proposition</a:t>
+              <a:t>Core Value</a:t>
             </a:r>
           </a:p>
           <a:p>
@@ -3343,7 +3343,7 @@
               <a:defRPr sz="1400"/>
             </a:pPr>
             <a:r>
-              <a:t>  Data-driven decisions, professional financial management</a:t>
+              <a:t>  Data-driven decisions, professional management</a:t>
             </a:r>
           </a:p>
           <a:p>
@@ -3353,9 +3353,6 @@
               </a:spcBef>
               <a:defRPr sz="1400"/>
             </a:pPr>
-            <a:r>
-              <a:t>  Transparent customer service</a:t>
-            </a:r>
           </a:p>
           <a:p>
             <a:pPr>
@@ -3364,6 +3361,9 @@
               </a:spcBef>
               <a:defRPr sz="1400"/>
             </a:pPr>
+            <a:r>
+              <a:t>Technical Guarantees</a:t>
+            </a:r>
           </a:p>
           <a:p>
             <a:pPr>
@@ -3373,18 +3373,7 @@
               <a:defRPr sz="1400"/>
             </a:pPr>
             <a:r>
-              <a:t>Technical Guarantees</a:t>
-            </a:r>
-          </a:p>
-          <a:p>
-            <a:pPr>
-              <a:spcBef>
-                <a:spcPts val="400"/>
-              </a:spcBef>
-              <a:defRPr sz="1400"/>
-            </a:pPr>
-            <a:r>
-              <a:t>  99.95% SLA, 9.8x performance, enterprise-grade security</a:t>
+              <a:t>  99.95% SLA, 9.8x performance, enterprise security</a:t>
             </a:r>
           </a:p>
         </p:txBody>
@@ -3437,7 +3426,7 @@
               </a:defRPr>
             </a:pPr>
             <a:r>
-              <a:t>5 Core Features</a:t>
+              <a:t>5 Core Features + Dual-Algorithm</a:t>
             </a:r>
           </a:p>
         </p:txBody>
@@ -3517,7 +3506,7 @@
               <a:defRPr sz="1400"/>
             </a:pPr>
             <a:r>
-              <a:t>1. Intelligent Mining Calculator - 17+ models, dual validation</a:t>
+              <a:t>1. Intelligent Mining Calculator</a:t>
             </a:r>
           </a:p>
           <a:p>
@@ -3527,6 +3516,9 @@
               </a:spcBef>
               <a:defRPr sz="1400"/>
             </a:pPr>
+            <a:r>
+              <a:t>   Dual-Algorithm Validation: Hashrate-based + Difficulty-based</a:t>
+            </a:r>
           </a:p>
           <a:p>
             <a:pPr>
@@ -3536,7 +3528,7 @@
               <a:defRPr sz="1400"/>
             </a:pPr>
             <a:r>
-              <a:t>2. Technical Analysis Platform - 10 signal modules</a:t>
+              <a:t>   Cross-validation with ±2% tolerance</a:t>
             </a:r>
           </a:p>
           <a:p>
@@ -3555,7 +3547,7 @@
               <a:defRPr sz="1400"/>
             </a:pPr>
             <a:r>
-              <a:t>3. Treasury Management - BTC inventory, selling strategies</a:t>
+              <a:t>2. Technical Analysis - 10 signal modules</a:t>
             </a:r>
           </a:p>
           <a:p>
@@ -3574,7 +3566,7 @@
               <a:defRPr sz="1400"/>
             </a:pPr>
             <a:r>
-              <a:t>4. CRM Customer Management - Full lifecycle tracking</a:t>
+              <a:t>3. Treasury Management - BTC inventory + strategies</a:t>
             </a:r>
           </a:p>
           <a:p>
@@ -3593,7 +3585,26 @@
               <a:defRPr sz="1400"/>
             </a:pPr>
             <a:r>
-              <a:t>5. Enterprise Security - KMS, mTLS, WireGuard VPN, audit logging</a:t>
+              <a:t>4. CRM - Full lifecycle management</a:t>
+            </a:r>
+          </a:p>
+          <a:p>
+            <a:pPr>
+              <a:spcBef>
+                <a:spcPts val="400"/>
+              </a:spcBef>
+              <a:defRPr sz="1400"/>
+            </a:pPr>
+          </a:p>
+          <a:p>
+            <a:pPr>
+              <a:spcBef>
+                <a:spcPts val="400"/>
+              </a:spcBef>
+              <a:defRPr sz="1400"/>
+            </a:pPr>
+            <a:r>
+              <a:t>5. Enterprise Security - KMS, mTLS, WireGuard VPN</a:t>
             </a:r>
           </a:p>
         </p:txBody>
@@ -3726,7 +3737,7 @@
               <a:defRPr sz="1400"/>
             </a:pPr>
             <a:r>
-              <a:t>🔐 KMS Key Management</a:t>
+              <a:t>KMS Key Management - Multi-cloud, AES-256, RSA-4096</a:t>
             </a:r>
           </a:p>
           <a:p>
@@ -3737,7 +3748,7 @@
               <a:defRPr sz="1400"/>
             </a:pPr>
             <a:r>
-              <a:t>  • Multi-cloud: AWS KMS, GCP KMS, Azure Key Vault</a:t>
+              <a:t>mTLS Authentication - X.509 certificates, CRL/OCSP</a:t>
             </a:r>
           </a:p>
           <a:p>
@@ -3748,7 +3759,7 @@
               <a:defRPr sz="1400"/>
             </a:pPr>
             <a:r>
-              <a:t>  • AES-256 encryption, RSA-4096 keys, 90-day rotation</a:t>
+              <a:t>API Key Management - Scoped permissions, rate limiting</a:t>
             </a:r>
           </a:p>
           <a:p>
@@ -3758,6 +3769,9 @@
               </a:spcBef>
               <a:defRPr sz="1400"/>
             </a:pPr>
+            <a:r>
+              <a:t>WireGuard VPN - Zero-trust, ChaCha20-Poly1305</a:t>
+            </a:r>
           </a:p>
           <a:p>
             <a:pPr>
@@ -3767,7 +3781,7 @@
               <a:defRPr sz="1400"/>
             </a:pPr>
             <a:r>
-              <a:t>🔒 mTLS Mutual Authentication</a:t>
+              <a:t>Audit Logging - 7-year retention, tamper-proof</a:t>
             </a:r>
           </a:p>
           <a:p>
@@ -3777,9 +3791,6 @@
               </a:spcBef>
               <a:defRPr sz="1400"/>
             </a:pPr>
-            <a:r>
-              <a:t>  • X.509 certificates, CRL/OCSP checking, certificate pinning</a:t>
-            </a:r>
           </a:p>
           <a:p>
             <a:pPr>
@@ -3788,6 +3799,9 @@
               </a:spcBef>
               <a:defRPr sz="1400"/>
             </a:pPr>
+            <a:r>
+              <a:t>Compliance Status:</a:t>
+            </a:r>
           </a:p>
           <a:p>
             <a:pPr>
@@ -3797,7 +3811,7 @@
               <a:defRPr sz="1400"/>
             </a:pPr>
             <a:r>
-              <a:t>🔑 Advanced API Key Management</a:t>
+              <a:t>  SOC 2 Type II Ready (Q1 2026 audit scheduled)</a:t>
             </a:r>
           </a:p>
           <a:p>
@@ -3808,7 +3822,7 @@
               <a:defRPr sz="1400"/>
             </a:pPr>
             <a:r>
-              <a:t>  • Scoped permissions, rate limiting, automatic expiration</a:t>
+              <a:t>  PCI DSS Compliant (via Stripe)</a:t>
             </a:r>
           </a:p>
           <a:p>
@@ -3818,68 +3832,8 @@
               </a:spcBef>
               <a:defRPr sz="1400"/>
             </a:pPr>
-          </a:p>
-          <a:p>
-            <a:pPr>
-              <a:spcBef>
-                <a:spcPts val="400"/>
-              </a:spcBef>
-              <a:defRPr sz="1400"/>
-            </a:pPr>
-            <a:r>
-              <a:t>🛡️ WireGuard Enterprise VPN</a:t>
-            </a:r>
-          </a:p>
-          <a:p>
-            <a:pPr>
-              <a:spcBef>
-                <a:spcPts val="400"/>
-              </a:spcBef>
-              <a:defRPr sz="1400"/>
-            </a:pPr>
-            <a:r>
-              <a:t>  • Zero-trust architecture, ChaCha20-Poly1305 encryption</a:t>
-            </a:r>
-          </a:p>
-          <a:p>
-            <a:pPr>
-              <a:spcBef>
-                <a:spcPts val="400"/>
-              </a:spcBef>
-              <a:defRPr sz="1400"/>
-            </a:pPr>
-          </a:p>
-          <a:p>
-            <a:pPr>
-              <a:spcBef>
-                <a:spcPts val="400"/>
-              </a:spcBef>
-              <a:defRPr sz="1400"/>
-            </a:pPr>
-            <a:r>
-              <a:t>📝 Audit Logging &amp; Compliance</a:t>
-            </a:r>
-          </a:p>
-          <a:p>
-            <a:pPr>
-              <a:spcBef>
-                <a:spcPts val="400"/>
-              </a:spcBef>
-              <a:defRPr sz="1400"/>
-            </a:pPr>
-            <a:r>
-              <a:t>  • SOC 2 Type II ready, PCI DSS, GDPR compliant</a:t>
-            </a:r>
-          </a:p>
-          <a:p>
-            <a:pPr>
-              <a:spcBef>
-                <a:spcPts val="400"/>
-              </a:spcBef>
-              <a:defRPr sz="1400"/>
-            </a:pPr>
-            <a:r>
-              <a:t>  • 24/7 security operations, quarterly penetration testing</a:t>
+            <a:r>
+              <a:t>  GDPR Fully Compliant</a:t>
             </a:r>
           </a:p>
         </p:txBody>
@@ -4382,7 +4336,561 @@
               </a:defRPr>
             </a:pPr>
             <a:r>
-              <a:t>6 Product Highlights</a:t>
+              <a:t>Competitive Advantage</a:t>
+            </a:r>
+          </a:p>
+        </p:txBody>
+      </p:sp>
+      <p:sp>
+        <p:nvSpPr>
+          <p:cNvPr id="3" name="Rectangle 2"/>
+          <p:cNvSpPr/>
+          <p:nvPr/>
+        </p:nvSpPr>
+        <p:spPr>
+          <a:xfrm>
+            <a:off x="457200" y="1143000"/>
+            <a:ext cx="8229600" cy="45720"/>
+          </a:xfrm>
+          <a:prstGeom prst="rect">
+            <a:avLst/>
+          </a:prstGeom>
+          <a:solidFill>
+            <a:srgbClr val="F39C12"/>
+          </a:solidFill>
+        </p:spPr>
+        <p:style>
+          <a:lnRef idx="1">
+            <a:schemeClr val="accent1"/>
+          </a:lnRef>
+          <a:fillRef idx="3">
+            <a:schemeClr val="accent1"/>
+          </a:fillRef>
+          <a:effectRef idx="2">
+            <a:schemeClr val="accent1"/>
+          </a:effectRef>
+          <a:fontRef idx="minor">
+            <a:schemeClr val="lt1"/>
+          </a:fontRef>
+        </p:style>
+        <p:txBody>
+          <a:bodyPr rtlCol="0" anchor="ctr"/>
+          <a:lstStyle/>
+          <a:p>
+            <a:pPr algn="ctr"/>
+          </a:p>
+        </p:txBody>
+      </p:sp>
+      <p:graphicFrame>
+        <p:nvGraphicFramePr>
+          <p:cNvPr id="4" name="Table 3"/>
+          <p:cNvGraphicFramePr>
+            <a:graphicFrameLocks noGrp="1"/>
+          </p:cNvGraphicFramePr>
+          <p:nvPr/>
+        </p:nvGraphicFramePr>
+        <p:xfrm>
+          <a:off x="731520" y="1828800"/>
+          <a:ext cx="7680960" cy="3657600"/>
+        </p:xfrm>
+        <a:graphic>
+          <a:graphicData uri="http://schemas.openxmlformats.org/drawingml/2006/table">
+            <a:tbl>
+              <a:tblPr firstRow="1" bandRow="1">
+                <a:tableStyleId>{5C22544A-7EE6-4342-B048-85BDC9FD1C3A}</a:tableStyleId>
+              </a:tblPr>
+              <a:tblGrid>
+                <a:gridCol w="1920240"/>
+                <a:gridCol w="1920240"/>
+                <a:gridCol w="1920240"/>
+                <a:gridCol w="1920240"/>
+              </a:tblGrid>
+              <a:tr h="609600">
+                <a:tc>
+                  <a:txBody>
+                    <a:bodyPr/>
+                    <a:lstStyle/>
+                    <a:p>
+                      <a:pPr>
+                        <a:defRPr b="1" sz="1300">
+                          <a:solidFill>
+                            <a:srgbClr val="FFFFFF"/>
+                          </a:solidFill>
+                        </a:defRPr>
+                      </a:pPr>
+                    </a:p>
+                  </a:txBody>
+                  <a:tcPr>
+                    <a:solidFill>
+                      <a:srgbClr val="34495E"/>
+                    </a:solidFill>
+                  </a:tcPr>
+                </a:tc>
+                <a:tc>
+                  <a:txBody>
+                    <a:bodyPr/>
+                    <a:lstStyle/>
+                    <a:p>
+                      <a:pPr>
+                        <a:defRPr b="1" sz="1300">
+                          <a:solidFill>
+                            <a:srgbClr val="FFFFFF"/>
+                          </a:solidFill>
+                        </a:defRPr>
+                      </a:pPr>
+                      <a:r>
+                        <a:t>HashInsight</a:t>
+                      </a:r>
+                    </a:p>
+                  </a:txBody>
+                  <a:tcPr>
+                    <a:solidFill>
+                      <a:srgbClr val="34495E"/>
+                    </a:solidFill>
+                  </a:tcPr>
+                </a:tc>
+                <a:tc>
+                  <a:txBody>
+                    <a:bodyPr/>
+                    <a:lstStyle/>
+                    <a:p>
+                      <a:pPr>
+                        <a:defRPr b="1" sz="1300">
+                          <a:solidFill>
+                            <a:srgbClr val="FFFFFF"/>
+                          </a:solidFill>
+                        </a:defRPr>
+                      </a:pPr>
+                      <a:r>
+                        <a:t>Foreman</a:t>
+                      </a:r>
+                    </a:p>
+                  </a:txBody>
+                  <a:tcPr>
+                    <a:solidFill>
+                      <a:srgbClr val="34495E"/>
+                    </a:solidFill>
+                  </a:tcPr>
+                </a:tc>
+                <a:tc>
+                  <a:txBody>
+                    <a:bodyPr/>
+                    <a:lstStyle/>
+                    <a:p>
+                      <a:pPr>
+                        <a:defRPr b="1" sz="1300">
+                          <a:solidFill>
+                            <a:srgbClr val="FFFFFF"/>
+                          </a:solidFill>
+                        </a:defRPr>
+                      </a:pPr>
+                      <a:r>
+                        <a:t>NiceHash</a:t>
+                      </a:r>
+                    </a:p>
+                  </a:txBody>
+                  <a:tcPr>
+                    <a:solidFill>
+                      <a:srgbClr val="34495E"/>
+                    </a:solidFill>
+                  </a:tcPr>
+                </a:tc>
+              </a:tr>
+              <a:tr h="609600">
+                <a:tc>
+                  <a:txBody>
+                    <a:bodyPr/>
+                    <a:lstStyle/>
+                    <a:p>
+                      <a:pPr>
+                        <a:defRPr sz="1100"/>
+                      </a:pPr>
+                      <a:r>
+                        <a:t>Dual-Algorithm</a:t>
+                      </a:r>
+                    </a:p>
+                  </a:txBody>
+                  <a:tcPr/>
+                </a:tc>
+                <a:tc>
+                  <a:txBody>
+                    <a:bodyPr/>
+                    <a:lstStyle/>
+                    <a:p>
+                      <a:pPr>
+                        <a:defRPr sz="1100"/>
+                      </a:pPr>
+                      <a:r>
+                        <a:t>✓</a:t>
+                      </a:r>
+                    </a:p>
+                  </a:txBody>
+                  <a:tcPr/>
+                </a:tc>
+                <a:tc>
+                  <a:txBody>
+                    <a:bodyPr/>
+                    <a:lstStyle/>
+                    <a:p>
+                      <a:pPr>
+                        <a:defRPr sz="1100"/>
+                      </a:pPr>
+                      <a:r>
+                        <a:t>✗</a:t>
+                      </a:r>
+                    </a:p>
+                  </a:txBody>
+                  <a:tcPr/>
+                </a:tc>
+                <a:tc>
+                  <a:txBody>
+                    <a:bodyPr/>
+                    <a:lstStyle/>
+                    <a:p>
+                      <a:pPr>
+                        <a:defRPr sz="1100"/>
+                      </a:pPr>
+                      <a:r>
+                        <a:t>✗</a:t>
+                      </a:r>
+                    </a:p>
+                  </a:txBody>
+                  <a:tcPr/>
+                </a:tc>
+              </a:tr>
+              <a:tr h="609600">
+                <a:tc>
+                  <a:txBody>
+                    <a:bodyPr/>
+                    <a:lstStyle/>
+                    <a:p>
+                      <a:pPr>
+                        <a:defRPr sz="1100"/>
+                      </a:pPr>
+                      <a:r>
+                        <a:t>Batch 5000+</a:t>
+                      </a:r>
+                    </a:p>
+                  </a:txBody>
+                  <a:tcPr>
+                    <a:solidFill>
+                      <a:srgbClr val="ECF0F1"/>
+                    </a:solidFill>
+                  </a:tcPr>
+                </a:tc>
+                <a:tc>
+                  <a:txBody>
+                    <a:bodyPr/>
+                    <a:lstStyle/>
+                    <a:p>
+                      <a:pPr>
+                        <a:defRPr sz="1100"/>
+                      </a:pPr>
+                      <a:r>
+                        <a:t>✓</a:t>
+                      </a:r>
+                    </a:p>
+                  </a:txBody>
+                  <a:tcPr>
+                    <a:solidFill>
+                      <a:srgbClr val="ECF0F1"/>
+                    </a:solidFill>
+                  </a:tcPr>
+                </a:tc>
+                <a:tc>
+                  <a:txBody>
+                    <a:bodyPr/>
+                    <a:lstStyle/>
+                    <a:p>
+                      <a:pPr>
+                        <a:defRPr sz="1100"/>
+                      </a:pPr>
+                      <a:r>
+                        <a:t>500 max</a:t>
+                      </a:r>
+                    </a:p>
+                  </a:txBody>
+                  <a:tcPr>
+                    <a:solidFill>
+                      <a:srgbClr val="ECF0F1"/>
+                    </a:solidFill>
+                  </a:tcPr>
+                </a:tc>
+                <a:tc>
+                  <a:txBody>
+                    <a:bodyPr/>
+                    <a:lstStyle/>
+                    <a:p>
+                      <a:pPr>
+                        <a:defRPr sz="1100"/>
+                      </a:pPr>
+                      <a:r>
+                        <a:t>Single only</a:t>
+                      </a:r>
+                    </a:p>
+                  </a:txBody>
+                  <a:tcPr>
+                    <a:solidFill>
+                      <a:srgbClr val="ECF0F1"/>
+                    </a:solidFill>
+                  </a:tcPr>
+                </a:tc>
+              </a:tr>
+              <a:tr h="609600">
+                <a:tc>
+                  <a:txBody>
+                    <a:bodyPr/>
+                    <a:lstStyle/>
+                    <a:p>
+                      <a:pPr>
+                        <a:defRPr sz="1100"/>
+                      </a:pPr>
+                      <a:r>
+                        <a:t>Treasury Mgmt</a:t>
+                      </a:r>
+                    </a:p>
+                  </a:txBody>
+                  <a:tcPr/>
+                </a:tc>
+                <a:tc>
+                  <a:txBody>
+                    <a:bodyPr/>
+                    <a:lstStyle/>
+                    <a:p>
+                      <a:pPr>
+                        <a:defRPr sz="1100"/>
+                      </a:pPr>
+                      <a:r>
+                        <a:t>✓</a:t>
+                      </a:r>
+                    </a:p>
+                  </a:txBody>
+                  <a:tcPr/>
+                </a:tc>
+                <a:tc>
+                  <a:txBody>
+                    <a:bodyPr/>
+                    <a:lstStyle/>
+                    <a:p>
+                      <a:pPr>
+                        <a:defRPr sz="1100"/>
+                      </a:pPr>
+                      <a:r>
+                        <a:t>✗</a:t>
+                      </a:r>
+                    </a:p>
+                  </a:txBody>
+                  <a:tcPr/>
+                </a:tc>
+                <a:tc>
+                  <a:txBody>
+                    <a:bodyPr/>
+                    <a:lstStyle/>
+                    <a:p>
+                      <a:pPr>
+                        <a:defRPr sz="1100"/>
+                      </a:pPr>
+                      <a:r>
+                        <a:t>✗</a:t>
+                      </a:r>
+                    </a:p>
+                  </a:txBody>
+                  <a:tcPr/>
+                </a:tc>
+              </a:tr>
+              <a:tr h="609600">
+                <a:tc>
+                  <a:txBody>
+                    <a:bodyPr/>
+                    <a:lstStyle/>
+                    <a:p>
+                      <a:pPr>
+                        <a:defRPr sz="1100"/>
+                      </a:pPr>
+                      <a:r>
+                        <a:t>SOC 2 Ready</a:t>
+                      </a:r>
+                    </a:p>
+                  </a:txBody>
+                  <a:tcPr>
+                    <a:solidFill>
+                      <a:srgbClr val="ECF0F1"/>
+                    </a:solidFill>
+                  </a:tcPr>
+                </a:tc>
+                <a:tc>
+                  <a:txBody>
+                    <a:bodyPr/>
+                    <a:lstStyle/>
+                    <a:p>
+                      <a:pPr>
+                        <a:defRPr sz="1100"/>
+                      </a:pPr>
+                      <a:r>
+                        <a:t>✓</a:t>
+                      </a:r>
+                    </a:p>
+                  </a:txBody>
+                  <a:tcPr>
+                    <a:solidFill>
+                      <a:srgbClr val="ECF0F1"/>
+                    </a:solidFill>
+                  </a:tcPr>
+                </a:tc>
+                <a:tc>
+                  <a:txBody>
+                    <a:bodyPr/>
+                    <a:lstStyle/>
+                    <a:p>
+                      <a:pPr>
+                        <a:defRPr sz="1100"/>
+                      </a:pPr>
+                      <a:r>
+                        <a:t>✗</a:t>
+                      </a:r>
+                    </a:p>
+                  </a:txBody>
+                  <a:tcPr>
+                    <a:solidFill>
+                      <a:srgbClr val="ECF0F1"/>
+                    </a:solidFill>
+                  </a:tcPr>
+                </a:tc>
+                <a:tc>
+                  <a:txBody>
+                    <a:bodyPr/>
+                    <a:lstStyle/>
+                    <a:p>
+                      <a:pPr>
+                        <a:defRPr sz="1100"/>
+                      </a:pPr>
+                      <a:r>
+                        <a:t>✗</a:t>
+                      </a:r>
+                    </a:p>
+                  </a:txBody>
+                  <a:tcPr>
+                    <a:solidFill>
+                      <a:srgbClr val="ECF0F1"/>
+                    </a:solidFill>
+                  </a:tcPr>
+                </a:tc>
+              </a:tr>
+              <a:tr h="609600">
+                <a:tc>
+                  <a:txBody>
+                    <a:bodyPr/>
+                    <a:lstStyle/>
+                    <a:p>
+                      <a:pPr>
+                        <a:defRPr sz="1100"/>
+                      </a:pPr>
+                      <a:r>
+                        <a:t>Support</a:t>
+                      </a:r>
+                    </a:p>
+                  </a:txBody>
+                  <a:tcPr/>
+                </a:tc>
+                <a:tc>
+                  <a:txBody>
+                    <a:bodyPr/>
+                    <a:lstStyle/>
+                    <a:p>
+                      <a:pPr>
+                        <a:defRPr sz="1100"/>
+                      </a:pPr>
+                      <a:r>
+                        <a:t>24/7+CSM</a:t>
+                      </a:r>
+                    </a:p>
+                  </a:txBody>
+                  <a:tcPr/>
+                </a:tc>
+                <a:tc>
+                  <a:txBody>
+                    <a:bodyPr/>
+                    <a:lstStyle/>
+                    <a:p>
+                      <a:pPr>
+                        <a:defRPr sz="1100"/>
+                      </a:pPr>
+                      <a:r>
+                        <a:t>Email</a:t>
+                      </a:r>
+                    </a:p>
+                  </a:txBody>
+                  <a:tcPr/>
+                </a:tc>
+                <a:tc>
+                  <a:txBody>
+                    <a:bodyPr/>
+                    <a:lstStyle/>
+                    <a:p>
+                      <a:pPr>
+                        <a:defRPr sz="1100"/>
+                      </a:pPr>
+                      <a:r>
+                        <a:t>Forum</a:t>
+                      </a:r>
+                    </a:p>
+                  </a:txBody>
+                  <a:tcPr/>
+                </a:tc>
+              </a:tr>
+            </a:tbl>
+          </a:graphicData>
+        </a:graphic>
+      </p:graphicFrame>
+    </p:spTree>
+  </p:cSld>
+  <p:clrMapOvr>
+    <a:masterClrMapping/>
+  </p:clrMapOvr>
+</p:sld>
+</file>
+
+<file path=ppt/slides/slide7.xml><?xml version="1.0" encoding="utf-8"?>
+<p:sld xmlns:a="http://schemas.openxmlformats.org/drawingml/2006/main" xmlns:p="http://schemas.openxmlformats.org/presentationml/2006/main" xmlns:r="http://schemas.openxmlformats.org/officeDocument/2006/relationships">
+  <p:cSld>
+    <p:spTree>
+      <p:nvGrpSpPr>
+        <p:cNvPr id="1" name=""/>
+        <p:cNvGrpSpPr/>
+        <p:nvPr/>
+      </p:nvGrpSpPr>
+      <p:grpSpPr/>
+      <p:sp>
+        <p:nvSpPr>
+          <p:cNvPr id="2" name="TextBox 1"/>
+          <p:cNvSpPr txBox="1"/>
+          <p:nvPr/>
+        </p:nvSpPr>
+        <p:spPr>
+          <a:xfrm>
+            <a:off x="457200" y="457200"/>
+            <a:ext cx="8229600" cy="731520"/>
+          </a:xfrm>
+          <a:prstGeom prst="rect">
+            <a:avLst/>
+          </a:prstGeom>
+          <a:noFill/>
+        </p:spPr>
+        <p:txBody>
+          <a:bodyPr wrap="none">
+            <a:spAutoFit/>
+          </a:bodyPr>
+          <a:lstStyle/>
+          <a:p>
+            <a:pPr>
+              <a:defRPr sz="3600" b="1">
+                <a:solidFill>
+                  <a:srgbClr val="2C3E50"/>
+                </a:solidFill>
+              </a:defRPr>
+            </a:pPr>
+            <a:r>
+              <a:t>Customer Success: 100MW Farm</a:t>
             </a:r>
           </a:p>
         </p:txBody>
@@ -4462,7 +4970,7 @@
               <a:defRPr sz="1400"/>
             </a:pPr>
             <a:r>
-              <a:t>1. Industry's Only Dual-Algorithm Validation System</a:t>
+              <a:t>Before HashInsight:</a:t>
             </a:r>
           </a:p>
           <a:p>
@@ -4472,6 +4980,9 @@
               </a:spcBef>
               <a:defRPr sz="1400"/>
             </a:pPr>
+            <a:r>
+              <a:t>  Calculation: 2 hours/day</a:t>
+            </a:r>
           </a:p>
           <a:p>
             <a:pPr>
@@ -4481,7 +4992,7 @@
               <a:defRPr sz="1400"/>
             </a:pPr>
             <a:r>
-              <a:t>2. 9.8x Performance via Request Coalescing</a:t>
+              <a:t>  Manual errors: 12/month</a:t>
             </a:r>
           </a:p>
           <a:p>
@@ -4491,6 +5002,9 @@
               </a:spcBef>
               <a:defRPr sz="1400"/>
             </a:pPr>
+            <a:r>
+              <a:t>  Customer complaints: 100/month</a:t>
+            </a:r>
           </a:p>
           <a:p>
             <a:pPr>
@@ -4499,9 +5013,6 @@
               </a:spcBef>
               <a:defRPr sz="1400"/>
             </a:pPr>
-            <a:r>
-              <a:t>3. Professional-Grade Treasury Management</a:t>
-            </a:r>
           </a:p>
           <a:p>
             <a:pPr>
@@ -4510,6 +5021,9 @@
               </a:spcBef>
               <a:defRPr sz="1400"/>
             </a:pPr>
+            <a:r>
+              <a:t>After HashInsight:</a:t>
+            </a:r>
           </a:p>
           <a:p>
             <a:pPr>
@@ -4519,7 +5033,7 @@
               <a:defRPr sz="1400"/>
             </a:pPr>
             <a:r>
-              <a:t>4. 10 Intelligent Signal Aggregation Modules</a:t>
+              <a:t>  Calculation: 5 minutes (24x faster)</a:t>
             </a:r>
           </a:p>
           <a:p>
@@ -4529,6 +5043,9 @@
               </a:spcBef>
               <a:defRPr sz="1400"/>
             </a:pPr>
+            <a:r>
+              <a:t>  Manual errors: 0/month (100% eliminated)</a:t>
+            </a:r>
           </a:p>
           <a:p>
             <a:pPr>
@@ -4538,7 +5055,7 @@
               <a:defRPr sz="1400"/>
             </a:pPr>
             <a:r>
-              <a:t>5. Enterprise-Grade Security &amp; Compliance</a:t>
+              <a:t>  Customer complaints: 30/month (70% reduction)</a:t>
             </a:r>
           </a:p>
           <a:p>
@@ -4549,7 +5066,7 @@
               <a:defRPr sz="1400"/>
             </a:pPr>
             <a:r>
-              <a:t>   KMS encryption, mTLS auth, SOC 2 ready</a:t>
+              <a:t>  Power cost savings: $1.8M/year</a:t>
             </a:r>
           </a:p>
           <a:p>
@@ -4568,211 +5085,7 @@
               <a:defRPr sz="1400"/>
             </a:pPr>
             <a:r>
-              <a:t>6. Fully Page-Isolated Architecture</a:t>
-            </a:r>
-          </a:p>
-        </p:txBody>
-      </p:sp>
-    </p:spTree>
-  </p:cSld>
-  <p:clrMapOvr>
-    <a:masterClrMapping/>
-  </p:clrMapOvr>
-</p:sld>
-</file>
-
-<file path=ppt/slides/slide7.xml><?xml version="1.0" encoding="utf-8"?>
-<p:sld xmlns:a="http://schemas.openxmlformats.org/drawingml/2006/main" xmlns:p="http://schemas.openxmlformats.org/presentationml/2006/main" xmlns:r="http://schemas.openxmlformats.org/officeDocument/2006/relationships">
-  <p:cSld>
-    <p:spTree>
-      <p:nvGrpSpPr>
-        <p:cNvPr id="1" name=""/>
-        <p:cNvGrpSpPr/>
-        <p:nvPr/>
-      </p:nvGrpSpPr>
-      <p:grpSpPr/>
-      <p:sp>
-        <p:nvSpPr>
-          <p:cNvPr id="2" name="TextBox 1"/>
-          <p:cNvSpPr txBox="1"/>
-          <p:nvPr/>
-        </p:nvSpPr>
-        <p:spPr>
-          <a:xfrm>
-            <a:off x="457200" y="457200"/>
-            <a:ext cx="8229600" cy="731520"/>
-          </a:xfrm>
-          <a:prstGeom prst="rect">
-            <a:avLst/>
-          </a:prstGeom>
-          <a:noFill/>
-        </p:spPr>
-        <p:txBody>
-          <a:bodyPr wrap="none">
-            <a:spAutoFit/>
-          </a:bodyPr>
-          <a:lstStyle/>
-          <a:p>
-            <a:pPr>
-              <a:defRPr sz="3600" b="1">
-                <a:solidFill>
-                  <a:srgbClr val="2C3E50"/>
-                </a:solidFill>
-              </a:defRPr>
-            </a:pPr>
-            <a:r>
-              <a:t>Typical Use Cases</a:t>
-            </a:r>
-          </a:p>
-        </p:txBody>
-      </p:sp>
-      <p:sp>
-        <p:nvSpPr>
-          <p:cNvPr id="3" name="Rectangle 2"/>
-          <p:cNvSpPr/>
-          <p:nvPr/>
-        </p:nvSpPr>
-        <p:spPr>
-          <a:xfrm>
-            <a:off x="457200" y="1143000"/>
-            <a:ext cx="8229600" cy="45720"/>
-          </a:xfrm>
-          <a:prstGeom prst="rect">
-            <a:avLst/>
-          </a:prstGeom>
-          <a:solidFill>
-            <a:srgbClr val="F39C12"/>
-          </a:solidFill>
-          <a:ln>
-            <a:solidFill>
-              <a:srgbClr val="F39C12"/>
-            </a:solidFill>
-          </a:ln>
-        </p:spPr>
-        <p:style>
-          <a:lnRef idx="1">
-            <a:schemeClr val="accent1"/>
-          </a:lnRef>
-          <a:fillRef idx="3">
-            <a:schemeClr val="accent1"/>
-          </a:fillRef>
-          <a:effectRef idx="2">
-            <a:schemeClr val="accent1"/>
-          </a:effectRef>
-          <a:fontRef idx="minor">
-            <a:schemeClr val="lt1"/>
-          </a:fontRef>
-        </p:style>
-        <p:txBody>
-          <a:bodyPr rtlCol="0" anchor="ctr"/>
-          <a:lstStyle/>
-          <a:p>
-            <a:pPr algn="ctr"/>
-          </a:p>
-        </p:txBody>
-      </p:sp>
-      <p:sp>
-        <p:nvSpPr>
-          <p:cNvPr id="4" name="TextBox 3"/>
-          <p:cNvSpPr txBox="1"/>
-          <p:nvPr/>
-        </p:nvSpPr>
-        <p:spPr>
-          <a:xfrm>
-            <a:off x="457200" y="1463040"/>
-            <a:ext cx="8229600" cy="4114800"/>
-          </a:xfrm>
-          <a:prstGeom prst="rect">
-            <a:avLst/>
-          </a:prstGeom>
-          <a:noFill/>
-        </p:spPr>
-        <p:txBody>
-          <a:bodyPr wrap="square">
-            <a:spAutoFit/>
-          </a:bodyPr>
-          <a:lstStyle/>
-          <a:p/>
-          <a:p>
-            <a:pPr>
-              <a:spcBef>
-                <a:spcPts val="400"/>
-              </a:spcBef>
-              <a:defRPr sz="1400"/>
-            </a:pPr>
-            <a:r>
-              <a:t>Large Mining Farms</a:t>
-            </a:r>
-          </a:p>
-          <a:p>
-            <a:pPr>
-              <a:spcBef>
-                <a:spcPts val="400"/>
-              </a:spcBef>
-              <a:defRPr sz="1400"/>
-            </a:pPr>
-            <a:r>
-              <a:t>  • 15,000+ miners, 10x efficiency, 15-20% cost savings</a:t>
-            </a:r>
-          </a:p>
-          <a:p>
-            <a:pPr>
-              <a:spcBef>
-                <a:spcPts val="400"/>
-              </a:spcBef>
-              <a:defRPr sz="1400"/>
-            </a:pPr>
-          </a:p>
-          <a:p>
-            <a:pPr>
-              <a:spcBef>
-                <a:spcPts val="400"/>
-              </a:spcBef>
-              <a:defRPr sz="1400"/>
-            </a:pPr>
-            <a:r>
-              <a:t>Hosting Providers</a:t>
-            </a:r>
-          </a:p>
-          <a:p>
-            <a:pPr>
-              <a:spcBef>
-                <a:spcPts val="400"/>
-              </a:spcBef>
-              <a:defRPr sz="1400"/>
-            </a:pPr>
-            <a:r>
-              <a:t>  • 300+ clients, 40% trust increase, standardized service</a:t>
-            </a:r>
-          </a:p>
-          <a:p>
-            <a:pPr>
-              <a:spcBef>
-                <a:spcPts val="400"/>
-              </a:spcBef>
-              <a:defRPr sz="1400"/>
-            </a:pPr>
-          </a:p>
-          <a:p>
-            <a:pPr>
-              <a:spcBef>
-                <a:spcPts val="400"/>
-              </a:spcBef>
-              <a:defRPr sz="1400"/>
-            </a:pPr>
-            <a:r>
-              <a:t>Institutional Investors</a:t>
-            </a:r>
-          </a:p>
-          <a:p>
-            <a:pPr>
-              <a:spcBef>
-                <a:spcPts val="400"/>
-              </a:spcBef>
-              <a:defRPr sz="1400"/>
-            </a:pPr>
-            <a:r>
-              <a:t>  • ROI evaluation, BTC inventory, 10-15% better timing</a:t>
+              <a:t>ROI: 158x | Payback: 2.3 days</a:t>
             </a:r>
           </a:p>
         </p:txBody>
@@ -4825,7 +5138,7 @@
               </a:defRPr>
             </a:pPr>
             <a:r>
-              <a:t>Flexible Subscription Plans</a:t>
+              <a:t>Pricing Plans</a:t>
             </a:r>
           </a:p>
         </p:txBody>
@@ -4894,7 +5207,7 @@
                 <a:gridCol w="1920240"/>
                 <a:gridCol w="1920240"/>
               </a:tblGrid>
-              <a:tr h="731520">
+              <a:tr h="914400">
                 <a:tc>
                   <a:txBody>
                     <a:bodyPr/>
@@ -4977,7 +5290,7 @@
                         </a:defRPr>
                       </a:pPr>
                       <a:r>
-                        <a:t>Key Features</a:t>
+                        <a:t>ROI</a:t>
                       </a:r>
                     </a:p>
                   </a:txBody>
@@ -4988,7 +5301,7 @@
                   </a:tcPr>
                 </a:tc>
               </a:tr>
-              <a:tr h="731520">
+              <a:tr h="914400">
                 <a:tc>
                   <a:txBody>
                     <a:bodyPr/>
@@ -4998,7 +5311,7 @@
                         <a:defRPr sz="1100"/>
                       </a:pPr>
                       <a:r>
-                        <a:t>Free</a:t>
+                        <a:t>Professional</a:t>
                       </a:r>
                     </a:p>
                   </a:txBody>
@@ -5013,7 +5326,7 @@
                         <a:defRPr sz="1100"/>
                       </a:pPr>
                       <a:r>
-                        <a:t>$0/mo</a:t>
+                        <a:t>$199/mo</a:t>
                       </a:r>
                     </a:p>
                   </a:txBody>
@@ -5028,7 +5341,7 @@
                         <a:defRPr sz="1100"/>
                       </a:pPr>
                       <a:r>
-                        <a:t>Individual</a:t>
+                        <a:t>Small-medium</a:t>
                       </a:r>
                     </a:p>
                   </a:txBody>
@@ -5043,14 +5356,14 @@
                         <a:defRPr sz="1100"/>
                       </a:pPr>
                       <a:r>
-                        <a:t>Basic calculator</a:t>
+                        <a:t>15-20x</a:t>
                       </a:r>
                     </a:p>
                   </a:txBody>
                   <a:tcPr/>
                 </a:tc>
               </a:tr>
-              <a:tr h="731520">
+              <a:tr h="914400">
                 <a:tc>
                   <a:txBody>
                     <a:bodyPr/>
@@ -5060,7 +5373,7 @@
                         <a:defRPr sz="1100"/>
                       </a:pPr>
                       <a:r>
-                        <a:t>Professional</a:t>
+                        <a:t>Enterprise</a:t>
                       </a:r>
                     </a:p>
                   </a:txBody>
@@ -5079,7 +5392,7 @@
                         <a:defRPr sz="1100"/>
                       </a:pPr>
                       <a:r>
-                        <a:t>$199/mo</a:t>
+                        <a:t>$999/mo</a:t>
                       </a:r>
                     </a:p>
                   </a:txBody>
@@ -5098,7 +5411,7 @@
                         <a:defRPr sz="1100"/>
                       </a:pPr>
                       <a:r>
-                        <a:t>Small-medium</a:t>
+                        <a:t>Large institutions</a:t>
                       </a:r>
                     </a:p>
                   </a:txBody>
@@ -5117,7 +5430,7 @@
                         <a:defRPr sz="1100"/>
                       </a:pPr>
                       <a:r>
-                        <a:t>Batch, analytics, CRM</a:t>
+                        <a:t>50-100x</a:t>
                       </a:r>
                     </a:p>
                   </a:txBody>
@@ -5128,7 +5441,7 @@
                   </a:tcPr>
                 </a:tc>
               </a:tr>
-              <a:tr h="731520">
+              <a:tr h="914400">
                 <a:tc>
                   <a:txBody>
                     <a:bodyPr/>
@@ -5138,7 +5451,7 @@
                         <a:defRPr sz="1100"/>
                       </a:pPr>
                       <a:r>
-                        <a:t>Enterprise</a:t>
+                        <a:t>Custom</a:t>
                       </a:r>
                     </a:p>
                   </a:txBody>
@@ -5153,7 +5466,7 @@
                         <a:defRPr sz="1100"/>
                       </a:pPr>
                       <a:r>
-                        <a:t>$999/mo</a:t>
+                        <a:t>Custom</a:t>
                       </a:r>
                     </a:p>
                   </a:txBody>
@@ -5168,7 +5481,7 @@
                         <a:defRPr sz="1100"/>
                       </a:pPr>
                       <a:r>
-                        <a:t>Large institutions</a:t>
+                        <a:t>Ultra-large</a:t>
                       </a:r>
                     </a:p>
                   </a:txBody>
@@ -5183,89 +5496,11 @@
                         <a:defRPr sz="1100"/>
                       </a:pPr>
                       <a:r>
-                        <a:t>Full features, Treasury</a:t>
+                        <a:t>100-200x</a:t>
                       </a:r>
                     </a:p>
                   </a:txBody>
                   <a:tcPr/>
-                </a:tc>
-              </a:tr>
-              <a:tr h="731520">
-                <a:tc>
-                  <a:txBody>
-                    <a:bodyPr/>
-                    <a:lstStyle/>
-                    <a:p>
-                      <a:pPr>
-                        <a:defRPr sz="1100"/>
-                      </a:pPr>
-                      <a:r>
-                        <a:t>Custom</a:t>
-                      </a:r>
-                    </a:p>
-                  </a:txBody>
-                  <a:tcPr>
-                    <a:solidFill>
-                      <a:srgbClr val="ECF0F1"/>
-                    </a:solidFill>
-                  </a:tcPr>
-                </a:tc>
-                <a:tc>
-                  <a:txBody>
-                    <a:bodyPr/>
-                    <a:lstStyle/>
-                    <a:p>
-                      <a:pPr>
-                        <a:defRPr sz="1100"/>
-                      </a:pPr>
-                      <a:r>
-                        <a:t>Custom</a:t>
-                      </a:r>
-                    </a:p>
-                  </a:txBody>
-                  <a:tcPr>
-                    <a:solidFill>
-                      <a:srgbClr val="ECF0F1"/>
-                    </a:solidFill>
-                  </a:tcPr>
-                </a:tc>
-                <a:tc>
-                  <a:txBody>
-                    <a:bodyPr/>
-                    <a:lstStyle/>
-                    <a:p>
-                      <a:pPr>
-                        <a:defRPr sz="1100"/>
-                      </a:pPr>
-                      <a:r>
-                        <a:t>Ultra-large</a:t>
-                      </a:r>
-                    </a:p>
-                  </a:txBody>
-                  <a:tcPr>
-                    <a:solidFill>
-                      <a:srgbClr val="ECF0F1"/>
-                    </a:solidFill>
-                  </a:tcPr>
-                </a:tc>
-                <a:tc>
-                  <a:txBody>
-                    <a:bodyPr/>
-                    <a:lstStyle/>
-                    <a:p>
-                      <a:pPr>
-                        <a:defRPr sz="1100"/>
-                      </a:pPr>
-                      <a:r>
-                        <a:t>Private deployment</a:t>
-                      </a:r>
-                    </a:p>
-                  </a:txBody>
-                  <a:tcPr>
-                    <a:solidFill>
-                      <a:srgbClr val="ECF0F1"/>
-                    </a:solidFill>
-                  </a:tcPr>
                 </a:tc>
               </a:tr>
             </a:tbl>
@@ -5501,7 +5736,7 @@
               <a:defRPr sz="1400"/>
             </a:pPr>
             <a:r>
-              <a:t>  • 24/7 technical hotline, 1-hour response SLA</a:t>
+              <a:t>  24/7 hotline, 1-hour response SLA</a:t>
             </a:r>
           </a:p>
         </p:txBody>
